--- a/docs/_template/reference-pieces.pptx
+++ b/docs/_template/reference-pieces.pptx
@@ -3391,7 +3391,7 @@
         <a:buNone/>
         <a:defRPr sz="3300" kern="1200">
           <a:solidFill>
-            <a:schemeClr val="tx1"/>
+            <a:schemeClr val="tx2"/>
           </a:solidFill>
           <a:latin typeface="+mj-lt"/>
           <a:ea typeface="+mj-ea"/>
